--- a/Presentation.pptx
+++ b/Presentation.pptx
@@ -11823,7 +11823,7 @@
         </p:nvSpPr>
         <p:spPr>
           <a:xfrm>
-            <a:off x="1167494" y="3606800"/>
+            <a:off x="740773" y="3566160"/>
             <a:ext cx="6220277" cy="2795451"/>
           </a:xfrm>
         </p:spPr>
@@ -11837,7 +11837,7 @@
           </a:p>
           <a:p>
             <a:r>
-              <a:rPr lang="en-US" dirty="0"/>
+              <a:rPr lang="en-US" sz="4400" b="1" dirty="0"/>
               <a:t>The Insight Lab:</a:t>
             </a:r>
           </a:p>
@@ -11963,8 +11963,8 @@
         </p:nvSpPr>
         <p:spPr>
           <a:xfrm>
-            <a:off x="1258933" y="2275840"/>
-            <a:ext cx="8149227" cy="1737360"/>
+            <a:off x="740773" y="1747520"/>
+            <a:ext cx="8149227" cy="2265680"/>
           </a:xfrm>
           <a:prstGeom prst="rect">
             <a:avLst/>
@@ -11972,7 +11972,7 @@
         </p:spPr>
         <p:txBody>
           <a:bodyPr vert="horz" lIns="91440" tIns="45720" rIns="91440" bIns="45720" rtlCol="0" anchor="t" anchorCtr="0">
-            <a:normAutofit fontScale="40000" lnSpcReduction="20000"/>
+            <a:normAutofit fontScale="55000" lnSpcReduction="20000"/>
           </a:bodyPr>
           <a:lstStyle>
             <a:lvl1pPr marL="0" indent="0" algn="l" defTabSz="914400" rtl="0" eaLnBrk="1" latinLnBrk="0" hangingPunct="1">
@@ -12157,6 +12157,20 @@
             <a:endParaRPr lang="en-US" sz="3700" dirty="0"/>
           </a:p>
           <a:p>
+            <a:r>
+              <a:rPr lang="en-US" sz="3600" dirty="0" err="1"/>
+              <a:t>StreamLit</a:t>
+            </a:r>
+            <a:r>
+              <a:rPr lang="en-US" sz="3600" dirty="0"/>
+              <a:t> App:</a:t>
+            </a:r>
+          </a:p>
+          <a:p>
+            <a:r>
+              <a:rPr lang="en-US" u="sng" dirty="0"/>
+              <a:t>.https://pancreatic-cancer-survival-prediction-j8c9ur8ygcnzdgusq7h7ho.streamlit.app</a:t>
+            </a:r>
             <a:endParaRPr lang="en-US" sz="7400" dirty="0"/>
           </a:p>
           <a:p>
@@ -12724,7 +12738,7 @@
         <p:spPr>
           <a:xfrm>
             <a:off x="1086212" y="-645794"/>
-            <a:ext cx="9601200" cy="1997074"/>
+            <a:ext cx="9601200" cy="1499234"/>
           </a:xfrm>
         </p:spPr>
         <p:txBody>
@@ -12764,8 +12778,8 @@
         </p:blipFill>
         <p:spPr>
           <a:xfrm>
-            <a:off x="1342040" y="2023984"/>
-            <a:ext cx="4314345" cy="3332832"/>
+            <a:off x="492965" y="1290321"/>
+            <a:ext cx="5749630" cy="4441589"/>
           </a:xfrm>
           <a:noFill/>
         </p:spPr>
@@ -12786,12 +12800,88 @@
             <p:ph idx="10"/>
           </p:nvPr>
         </p:nvSpPr>
-        <p:spPr/>
+        <p:spPr>
+          <a:xfrm>
+            <a:off x="6242595" y="2081129"/>
+            <a:ext cx="4663440" cy="3486550"/>
+          </a:xfrm>
+        </p:spPr>
         <p:txBody>
-          <a:bodyPr/>
+          <a:bodyPr>
+            <a:normAutofit/>
+          </a:bodyPr>
           <a:lstStyle/>
           <a:p>
-            <a:endParaRPr lang="en-US"/>
+            <a:r>
+              <a:rPr lang="en-US" dirty="0"/>
+              <a:t>This chart shows that the majority of deaths are in the first few months of diagnosis. From approximately 0 up to 20 Months.</a:t>
+            </a:r>
+          </a:p>
+          <a:p>
+            <a:r>
+              <a:rPr lang="en-US" dirty="0"/>
+              <a:t>However, after this period, the number of living is higher than deaths, with some reaching past 60 Months.</a:t>
+            </a:r>
+          </a:p>
+          <a:p>
+            <a:r>
+              <a:rPr lang="en-US" dirty="0"/>
+              <a:t>Therefore, an average patient has a survival time of 1 Year and 8 months after testing positive for pancreatic cancer.</a:t>
+            </a:r>
+          </a:p>
+        </p:txBody>
+      </p:sp>
+      <p:sp>
+        <p:nvSpPr>
+          <p:cNvPr id="9" name="Title 1">
+            <a:extLst>
+              <a:ext uri="{FF2B5EF4-FFF2-40B4-BE49-F238E27FC236}">
+                <a16:creationId xmlns:a16="http://schemas.microsoft.com/office/drawing/2014/main" id="{51729D9C-2DC8-D6CC-8C2C-6E4FDFF87FDD}"/>
+              </a:ext>
+            </a:extLst>
+          </p:cNvPr>
+          <p:cNvSpPr txBox="1">
+            <a:spLocks/>
+          </p:cNvSpPr>
+          <p:nvPr/>
+        </p:nvSpPr>
+        <p:spPr>
+          <a:xfrm>
+            <a:off x="6242595" y="1423788"/>
+            <a:ext cx="4048035" cy="523874"/>
+          </a:xfrm>
+          <a:prstGeom prst="rect">
+            <a:avLst/>
+          </a:prstGeom>
+        </p:spPr>
+        <p:txBody>
+          <a:bodyPr vert="horz" lIns="91440" tIns="45720" rIns="91440" bIns="45720" rtlCol="0" anchor="b">
+            <a:normAutofit/>
+          </a:bodyPr>
+          <a:lstStyle>
+            <a:lvl1pPr algn="l" defTabSz="914400" rtl="0" eaLnBrk="1" latinLnBrk="0" hangingPunct="1">
+              <a:lnSpc>
+                <a:spcPct val="80000"/>
+              </a:lnSpc>
+              <a:spcBef>
+                <a:spcPct val="0"/>
+              </a:spcBef>
+              <a:buNone/>
+              <a:defRPr sz="4200" b="1" kern="1200">
+                <a:solidFill>
+                  <a:schemeClr val="tx1"/>
+                </a:solidFill>
+                <a:latin typeface="+mj-lt"/>
+                <a:ea typeface="+mj-ea"/>
+                <a:cs typeface="+mj-cs"/>
+              </a:defRPr>
+            </a:lvl1pPr>
+          </a:lstStyle>
+          <a:p>
+            <a:r>
+              <a:rPr lang="en-US" sz="2400" dirty="0"/>
+              <a:t>Overall Survival Distribution</a:t>
+            </a:r>
           </a:p>
         </p:txBody>
       </p:sp>
@@ -12843,15 +12933,18 @@
         </p:nvSpPr>
         <p:spPr>
           <a:xfrm>
-            <a:off x="1167492" y="136526"/>
-            <a:ext cx="9601200" cy="1653371"/>
+            <a:off x="1167492" y="136527"/>
+            <a:ext cx="9601200" cy="1204594"/>
           </a:xfrm>
         </p:spPr>
         <p:txBody>
           <a:bodyPr/>
           <a:lstStyle/>
           <a:p>
-            <a:endParaRPr lang="en-US" dirty="0"/>
+            <a:r>
+              <a:rPr lang="en-US" sz="3200" dirty="0"/>
+              <a:t>Cancer stage and Survival Status</a:t>
+            </a:r>
           </a:p>
         </p:txBody>
       </p:sp>
@@ -12873,15 +12966,38 @@
         </p:nvSpPr>
         <p:spPr>
           <a:xfrm>
-            <a:off x="6283235" y="2023984"/>
-            <a:ext cx="4663440" cy="3332832"/>
+            <a:off x="6283235" y="1693836"/>
+            <a:ext cx="4663440" cy="3662980"/>
           </a:xfrm>
         </p:spPr>
         <p:txBody>
-          <a:bodyPr/>
+          <a:bodyPr>
+            <a:normAutofit/>
+          </a:bodyPr>
           <a:lstStyle/>
           <a:p>
-            <a:endParaRPr lang="en-US"/>
+            <a:r>
+              <a:rPr lang="en-US" dirty="0"/>
+              <a:t>The bar chart shows that most patients with Stage 1–3 cancer are living, while fewer have died.</a:t>
+            </a:r>
+          </a:p>
+          <a:p>
+            <a:br>
+              <a:rPr lang="en-US" dirty="0"/>
+            </a:br>
+            <a:r>
+              <a:rPr lang="en-US" dirty="0"/>
+              <a:t>A larger number of patients diagnosed at these stages are still alive, indicating that early detection and treatment may lead to higher chances of survival.</a:t>
+            </a:r>
+          </a:p>
+          <a:p>
+            <a:r>
+              <a:rPr lang="en-US" dirty="0"/>
+              <a:t>It highlights the potential benefit of catching cancer before it progresses to more advanced stages.</a:t>
+            </a:r>
+          </a:p>
+          <a:p>
+            <a:endParaRPr lang="en-US" dirty="0"/>
           </a:p>
         </p:txBody>
       </p:sp>
@@ -12909,8 +13025,8 @@
         </p:blipFill>
         <p:spPr>
           <a:xfrm>
-            <a:off x="1308648" y="2024063"/>
-            <a:ext cx="4380404" cy="3332162"/>
+            <a:off x="721907" y="1571915"/>
+            <a:ext cx="5372971" cy="4087205"/>
           </a:xfrm>
           <a:noFill/>
         </p:spPr>
@@ -12993,15 +13109,67 @@
         </p:nvSpPr>
         <p:spPr>
           <a:xfrm>
-            <a:off x="8239759" y="1888072"/>
-            <a:ext cx="2686595" cy="3332832"/>
+            <a:off x="7792721" y="1888072"/>
+            <a:ext cx="3133634" cy="3332832"/>
           </a:xfrm>
         </p:spPr>
         <p:txBody>
-          <a:bodyPr/>
+          <a:bodyPr>
+            <a:normAutofit fontScale="92500" lnSpcReduction="10000"/>
+          </a:bodyPr>
           <a:lstStyle/>
           <a:p>
-            <a:endParaRPr lang="en-US" dirty="0"/>
+            <a:r>
+              <a:rPr lang="en-US" dirty="0"/>
+              <a:t>This stacked bar chart shows the Top 10 Metastatic Site’s and their link to Survival status.</a:t>
+            </a:r>
+          </a:p>
+          <a:p>
+            <a:r>
+              <a:rPr lang="en-US" dirty="0"/>
+              <a:t>As you can see, the highest for both survival and death is the Liver, next is the Lungs.</a:t>
+            </a:r>
+          </a:p>
+          <a:p>
+            <a:r>
+              <a:rPr lang="en-US" dirty="0"/>
+              <a:t>This means the most common area for pancreatic cancer to spread is the Liver.</a:t>
+            </a:r>
+          </a:p>
+        </p:txBody>
+      </p:sp>
+      <p:sp>
+        <p:nvSpPr>
+          <p:cNvPr id="6" name="Title 1">
+            <a:extLst>
+              <a:ext uri="{FF2B5EF4-FFF2-40B4-BE49-F238E27FC236}">
+                <a16:creationId xmlns:a16="http://schemas.microsoft.com/office/drawing/2014/main" id="{549648F4-D6FE-03C6-CB21-8AC9B4BB4C1B}"/>
+              </a:ext>
+            </a:extLst>
+          </p:cNvPr>
+          <p:cNvSpPr>
+            <a:spLocks noGrp="1"/>
+          </p:cNvSpPr>
+          <p:nvPr>
+            <p:ph type="title"/>
+          </p:nvPr>
+        </p:nvSpPr>
+        <p:spPr>
+          <a:xfrm>
+            <a:off x="1086212" y="-645794"/>
+            <a:ext cx="9601200" cy="1997074"/>
+          </a:xfrm>
+        </p:spPr>
+        <p:txBody>
+          <a:bodyPr anchor="b">
+            <a:normAutofit/>
+          </a:bodyPr>
+          <a:lstStyle/>
+          <a:p>
+            <a:r>
+              <a:rPr lang="en-US" sz="3200" dirty="0"/>
+              <a:t>Metastatic Site and Survival Status</a:t>
+            </a:r>
           </a:p>
         </p:txBody>
       </p:sp>
@@ -13053,8 +13221,8 @@
         </p:nvSpPr>
         <p:spPr>
           <a:xfrm>
-            <a:off x="1167492" y="457200"/>
-            <a:ext cx="9692640" cy="1371600"/>
+            <a:off x="660400" y="194096"/>
+            <a:ext cx="9692640" cy="923504"/>
           </a:xfrm>
         </p:spPr>
         <p:txBody>
@@ -13086,8 +13254,8 @@
         </p:nvSpPr>
         <p:spPr>
           <a:xfrm>
-            <a:off x="1167493" y="2087561"/>
-            <a:ext cx="2693306" cy="3890543"/>
+            <a:off x="660400" y="1769096"/>
+            <a:ext cx="3789679" cy="3890543"/>
           </a:xfrm>
         </p:spPr>
         <p:txBody>
@@ -13096,14 +13264,28 @@
           <a:p>
             <a:r>
               <a:rPr lang="en-US" dirty="0"/>
-              <a:t>Learn to infuse energy into your delivery to leave a lasting impression</a:t>
-            </a:r>
-          </a:p>
-          <a:p>
+              <a:t>The best-performing model (</a:t>
+            </a:r>
+            <a:r>
+              <a:rPr lang="en-US" dirty="0" err="1"/>
+              <a:t>XGBoost</a:t>
+            </a:r>
             <a:r>
               <a:rPr lang="en-US" dirty="0"/>
-              <a:t>One of the goals of effective communication is to motivate your audience</a:t>
-            </a:r>
+              <a:t>) achieved high recall for deceased patients (0.93) using a tuned threshold. </a:t>
+            </a:r>
+          </a:p>
+          <a:p>
+            <a:r>
+              <a:rPr lang="en-US" dirty="0"/>
+              <a:t>This demonstrates strong potential to identify patients at higher risk at the point of diagnosis or early treatment.</a:t>
+            </a:r>
+          </a:p>
+          <a:p>
+            <a:br>
+              <a:rPr lang="en-US" dirty="0"/>
+            </a:br>
+            <a:endParaRPr lang="en-US" dirty="0"/>
           </a:p>
           <a:p>
             <a:endParaRPr lang="en-US" dirty="0"/>
@@ -13126,13 +13308,13 @@
             <p:ph idx="1"/>
             <p:extLst>
               <p:ext uri="{D42A27DB-BD31-4B8C-83A1-F6EECF244321}">
-                <p14:modId xmlns:p14="http://schemas.microsoft.com/office/powerpoint/2010/main" val="2435810308"/>
+                <p14:modId xmlns:p14="http://schemas.microsoft.com/office/powerpoint/2010/main" val="562092674"/>
               </p:ext>
             </p:extLst>
           </p:nvPr>
         </p:nvGraphicFramePr>
         <p:xfrm>
-          <a:off x="4561840" y="2072002"/>
+          <a:off x="4561840" y="1769096"/>
           <a:ext cx="6771640" cy="4527472"/>
         </p:xfrm>
         <a:graphic>
@@ -13192,10 +13374,10 @@
                     <a:lstStyle/>
                     <a:p>
                       <a:r>
-                        <a:rPr lang="en-US" b="1"/>
+                        <a:rPr lang="en-US" b="1" dirty="0"/>
                         <a:t>Precision</a:t>
                       </a:r>
-                      <a:endParaRPr lang="en-US"/>
+                      <a:endParaRPr lang="en-US" dirty="0"/>
                     </a:p>
                   </a:txBody>
                   <a:tcPr anchor="ctr"/>
@@ -13646,12 +13828,14 @@
         </p:nvSpPr>
         <p:spPr>
           <a:xfrm>
-            <a:off x="1167492" y="45085"/>
-            <a:ext cx="9779183" cy="1600835"/>
+            <a:off x="1167492" y="69008"/>
+            <a:ext cx="9779183" cy="1706563"/>
           </a:xfrm>
         </p:spPr>
         <p:txBody>
-          <a:bodyPr/>
+          <a:bodyPr anchor="b">
+            <a:normAutofit/>
+          </a:bodyPr>
           <a:lstStyle/>
           <a:p>
             <a:r>
@@ -13674,46 +13858,80 @@
             <a:spLocks noGrp="1"/>
           </p:cNvSpPr>
           <p:nvPr>
-            <p:ph idx="14"/>
+            <p:ph idx="12"/>
           </p:nvPr>
         </p:nvSpPr>
         <p:spPr>
           <a:xfrm>
-            <a:off x="1166813" y="2652713"/>
-            <a:ext cx="9780587" cy="3436937"/>
+            <a:off x="1167492" y="2023984"/>
+            <a:ext cx="5172347" cy="3809644"/>
           </a:xfrm>
         </p:spPr>
         <p:txBody>
           <a:bodyPr>
-            <a:normAutofit/>
+            <a:normAutofit fontScale="92500" lnSpcReduction="20000"/>
           </a:bodyPr>
           <a:lstStyle/>
           <a:p>
+            <a:pPr marL="0" indent="0">
+              <a:buNone/>
+            </a:pPr>
             <a:r>
               <a:rPr lang="en-US" dirty="0"/>
-              <a:t>Make eye contact with your audience to create a sense of intimacy and involvement</a:t>
-            </a:r>
-          </a:p>
-          <a:p>
+              <a:t>We assigned each patient a risk score (0 to 1) based on clinical and genomic data to estimate their likelihood of dying from pancreatic cancer. Patients with higher scores were classified as high risk.</a:t>
+            </a:r>
+          </a:p>
+          <a:p>
+            <a:pPr marL="0" indent="0">
+              <a:buNone/>
+            </a:pPr>
             <a:r>
               <a:rPr lang="en-US" dirty="0"/>
-              <a:t>Weave relatable stories into your presentation using narratives that make your message memorable and impactful</a:t>
-            </a:r>
-          </a:p>
-          <a:p>
+              <a:t>At the optimal threshold, the model achieved 80% overall accuracy. It correctly identified 93% of deceased patients (recall) and had 80% precision for high-risk predictions. For living patients, precision was 77%, with a recall of 49%.</a:t>
+            </a:r>
+          </a:p>
+          <a:p>
+            <a:pPr marL="0" indent="0">
+              <a:buNone/>
+            </a:pPr>
             <a:r>
               <a:rPr lang="en-US" dirty="0"/>
-              <a:t>Encourage questions and provide thoughtful responses to enhance audience participation</a:t>
-            </a:r>
-          </a:p>
-          <a:p>
-            <a:r>
-              <a:rPr lang="en-US" dirty="0"/>
-              <a:t>Use live polls or surveys to gather audience opinions, promoting engagement and making sure the audience feel involved</a:t>
+              <a:t>This approach enables early identification of high-risk patients who may benefit from aggressive treatment or clinical trials, while low-risk patients can be managed less invasively.</a:t>
             </a:r>
           </a:p>
         </p:txBody>
       </p:sp>
+      <p:pic>
+        <p:nvPicPr>
+          <p:cNvPr id="4" name="Picture 3">
+            <a:extLst>
+              <a:ext uri="{FF2B5EF4-FFF2-40B4-BE49-F238E27FC236}">
+                <a16:creationId xmlns:a16="http://schemas.microsoft.com/office/drawing/2014/main" id="{1DF01AF9-64FE-2CAF-1A8A-B762A82A498A}"/>
+              </a:ext>
+            </a:extLst>
+          </p:cNvPr>
+          <p:cNvPicPr>
+            <a:picLocks noChangeAspect="1"/>
+          </p:cNvPicPr>
+          <p:nvPr/>
+        </p:nvPicPr>
+        <p:blipFill>
+          <a:blip r:embed="rId3"/>
+          <a:stretch>
+            <a:fillRect/>
+          </a:stretch>
+        </p:blipFill>
+        <p:spPr>
+          <a:xfrm>
+            <a:off x="6528902" y="2023984"/>
+            <a:ext cx="4931578" cy="3809645"/>
+          </a:xfrm>
+          <a:prstGeom prst="rect">
+            <a:avLst/>
+          </a:prstGeom>
+          <a:noFill/>
+        </p:spPr>
+      </p:pic>
     </p:spTree>
     <p:extLst>
       <p:ext uri="{BB962C8B-B14F-4D97-AF65-F5344CB8AC3E}">
